--- a/ppt.pptx
+++ b/ppt.pptx
@@ -18602,206 +18602,12 @@
           </p:txBody>
         </p:sp>
       </p:grpSp>
-      <p:sp>
-        <p:nvSpPr>
-          <p:cNvPr id="476" name="Ellipszis 475">
+      <p:grpSp>
+        <p:nvGrpSpPr>
+          <p:cNvPr id="459" name="Csoportba foglalás 458">
             <a:extLst>
               <a:ext uri="{FF2B5EF4-FFF2-40B4-BE49-F238E27FC236}">
-                <a16:creationId xmlns:a16="http://schemas.microsoft.com/office/drawing/2014/main" id="{C3858953-170E-D2DB-329B-58F9659F42D5}"/>
-              </a:ext>
-            </a:extLst>
-          </p:cNvPr>
-          <p:cNvSpPr/>
-          <p:nvPr/>
-        </p:nvSpPr>
-        <p:spPr>
-          <a:xfrm>
-            <a:off x="16439062" y="2538223"/>
-            <a:ext cx="2663901" cy="2663901"/>
-          </a:xfrm>
-          <a:prstGeom prst="ellipse">
-            <a:avLst/>
-          </a:prstGeom>
-          <a:solidFill>
-            <a:srgbClr val="FFFF00"/>
-          </a:solidFill>
-          <a:ln>
-            <a:noFill/>
-          </a:ln>
-        </p:spPr>
-        <p:style>
-          <a:lnRef idx="2">
-            <a:schemeClr val="accent1">
-              <a:shade val="15000"/>
-            </a:schemeClr>
-          </a:lnRef>
-          <a:fillRef idx="1">
-            <a:schemeClr val="accent1"/>
-          </a:fillRef>
-          <a:effectRef idx="0">
-            <a:schemeClr val="accent1"/>
-          </a:effectRef>
-          <a:fontRef idx="minor">
-            <a:schemeClr val="lt1"/>
-          </a:fontRef>
-        </p:style>
-        <p:txBody>
-          <a:bodyPr rtlCol="0" anchor="ctr"/>
-          <a:lstStyle/>
-          <a:p>
-            <a:pPr algn="ctr"/>
-            <a:endParaRPr lang="hu-HU" dirty="0"/>
-          </a:p>
-        </p:txBody>
-      </p:sp>
-      <p:sp>
-        <p:nvSpPr>
-          <p:cNvPr id="478" name="Körcikk 477">
-            <a:extLst>
-              <a:ext uri="{FF2B5EF4-FFF2-40B4-BE49-F238E27FC236}">
-                <a16:creationId xmlns:a16="http://schemas.microsoft.com/office/drawing/2014/main" id="{698FD4C6-6376-4744-B837-5784C06744C2}"/>
-              </a:ext>
-            </a:extLst>
-          </p:cNvPr>
-          <p:cNvSpPr/>
-          <p:nvPr/>
-        </p:nvSpPr>
-        <p:spPr>
-          <a:xfrm>
-            <a:off x="16439756" y="2538917"/>
-            <a:ext cx="2662512" cy="2662512"/>
-          </a:xfrm>
-          <a:prstGeom prst="pie">
-            <a:avLst/>
-          </a:prstGeom>
-          <a:solidFill>
-            <a:schemeClr val="tx2">
-              <a:lumMod val="75000"/>
-              <a:lumOff val="25000"/>
-            </a:schemeClr>
-          </a:solidFill>
-          <a:ln>
-            <a:noFill/>
-          </a:ln>
-        </p:spPr>
-        <p:style>
-          <a:lnRef idx="2">
-            <a:schemeClr val="accent1">
-              <a:shade val="15000"/>
-            </a:schemeClr>
-          </a:lnRef>
-          <a:fillRef idx="1">
-            <a:schemeClr val="accent1"/>
-          </a:fillRef>
-          <a:effectRef idx="0">
-            <a:schemeClr val="accent1"/>
-          </a:effectRef>
-          <a:fontRef idx="minor">
-            <a:schemeClr val="lt1"/>
-          </a:fontRef>
-        </p:style>
-        <p:txBody>
-          <a:bodyPr rtlCol="0" anchor="ctr"/>
-          <a:lstStyle/>
-          <a:p>
-            <a:pPr algn="ctr"/>
-            <a:endParaRPr lang="hu-HU">
-              <a:solidFill>
-                <a:schemeClr val="tx1"/>
-              </a:solidFill>
-            </a:endParaRPr>
-          </a:p>
-        </p:txBody>
-      </p:sp>
-      <p:sp>
-        <p:nvSpPr>
-          <p:cNvPr id="480" name="Szövegdoboz 479">
-            <a:extLst>
-              <a:ext uri="{FF2B5EF4-FFF2-40B4-BE49-F238E27FC236}">
-                <a16:creationId xmlns:a16="http://schemas.microsoft.com/office/drawing/2014/main" id="{50F79048-070D-B95C-4719-0269585F76BB}"/>
-              </a:ext>
-            </a:extLst>
-          </p:cNvPr>
-          <p:cNvSpPr txBox="1"/>
-          <p:nvPr/>
-        </p:nvSpPr>
-        <p:spPr>
-          <a:xfrm>
-            <a:off x="16782481" y="4109883"/>
-            <a:ext cx="1607880" cy="369332"/>
-          </a:xfrm>
-          <a:prstGeom prst="rect">
-            <a:avLst/>
-          </a:prstGeom>
-          <a:noFill/>
-        </p:spPr>
-        <p:txBody>
-          <a:bodyPr wrap="square" rtlCol="0">
-            <a:spAutoFit/>
-          </a:bodyPr>
-          <a:lstStyle/>
-          <a:p>
-            <a:r>
-              <a:rPr lang="hu-HU" dirty="0">
-                <a:solidFill>
-                  <a:schemeClr val="bg1"/>
-                </a:solidFill>
-                <a:latin typeface="Arial Black" panose="020B0A04020102020204" pitchFamily="34" charset="0"/>
-              </a:rPr>
-              <a:t>75%</a:t>
-            </a:r>
-          </a:p>
-        </p:txBody>
-      </p:sp>
-      <p:sp>
-        <p:nvSpPr>
-          <p:cNvPr id="482" name="Szövegdoboz 481">
-            <a:extLst>
-              <a:ext uri="{FF2B5EF4-FFF2-40B4-BE49-F238E27FC236}">
-                <a16:creationId xmlns:a16="http://schemas.microsoft.com/office/drawing/2014/main" id="{2AA0DB8B-A027-76A2-3892-D0FBD1C73EFD}"/>
-              </a:ext>
-            </a:extLst>
-          </p:cNvPr>
-          <p:cNvSpPr txBox="1"/>
-          <p:nvPr/>
-        </p:nvSpPr>
-        <p:spPr>
-          <a:xfrm>
-            <a:off x="18015692" y="3164752"/>
-            <a:ext cx="1607880" cy="369332"/>
-          </a:xfrm>
-          <a:prstGeom prst="rect">
-            <a:avLst/>
-          </a:prstGeom>
-          <a:noFill/>
-        </p:spPr>
-        <p:txBody>
-          <a:bodyPr wrap="square" rtlCol="0">
-            <a:spAutoFit/>
-          </a:bodyPr>
-          <a:lstStyle/>
-          <a:p>
-            <a:r>
-              <a:rPr lang="hu-HU" dirty="0">
-                <a:solidFill>
-                  <a:schemeClr val="tx1">
-                    <a:lumMod val="85000"/>
-                    <a:lumOff val="15000"/>
-                  </a:schemeClr>
-                </a:solidFill>
-                <a:latin typeface="Arial Black" panose="020B0A04020102020204" pitchFamily="34" charset="0"/>
-              </a:rPr>
-              <a:t>25%</a:t>
-            </a:r>
-          </a:p>
-        </p:txBody>
-      </p:sp>
-      <p:grpSp>
-        <p:nvGrpSpPr>
-          <p:cNvPr id="34" name="Csoportba foglalás 33">
-            <a:extLst>
-              <a:ext uri="{FF2B5EF4-FFF2-40B4-BE49-F238E27FC236}">
-                <a16:creationId xmlns:a16="http://schemas.microsoft.com/office/drawing/2014/main" id="{7C827F22-43D4-436C-4FE1-6282A45D95A6}"/>
+                <a16:creationId xmlns:a16="http://schemas.microsoft.com/office/drawing/2014/main" id="{E986EEC3-582A-9643-A38B-1839DD6B99E3}"/>
               </a:ext>
             </a:extLst>
           </p:cNvPr>
@@ -18818,10 +18624,10 @@
         </p:grpSpPr>
         <p:grpSp>
           <p:nvGrpSpPr>
-            <p:cNvPr id="35" name="Csoportba foglalás 34">
+            <p:cNvPr id="460" name="Csoportba foglalás 459">
               <a:extLst>
                 <a:ext uri="{FF2B5EF4-FFF2-40B4-BE49-F238E27FC236}">
-                  <a16:creationId xmlns:a16="http://schemas.microsoft.com/office/drawing/2014/main" id="{DD51412D-797E-C277-F279-D07400227C54}"/>
+                  <a16:creationId xmlns:a16="http://schemas.microsoft.com/office/drawing/2014/main" id="{7233D5EC-9EE7-91DE-F337-D0CE49EDDF0E}"/>
                 </a:ext>
               </a:extLst>
             </p:cNvPr>
@@ -18838,10 +18644,10 @@
           </p:grpSpPr>
           <p:sp>
             <p:nvSpPr>
-              <p:cNvPr id="47" name="Téglalap 46">
+              <p:cNvPr id="472" name="Téglalap 471">
                 <a:extLst>
                   <a:ext uri="{FF2B5EF4-FFF2-40B4-BE49-F238E27FC236}">
-                    <a16:creationId xmlns:a16="http://schemas.microsoft.com/office/drawing/2014/main" id="{B42A97C1-5F63-5AA3-5B62-2CFA8FFA2D2B}"/>
+                    <a16:creationId xmlns:a16="http://schemas.microsoft.com/office/drawing/2014/main" id="{2C84F712-5A99-FA37-4868-8E459FDE3020}"/>
                   </a:ext>
                 </a:extLst>
               </p:cNvPr>
@@ -18893,10 +18699,10 @@
           </p:sp>
           <p:sp>
             <p:nvSpPr>
-              <p:cNvPr id="48" name="Szövegdoboz 47">
+              <p:cNvPr id="473" name="Szövegdoboz 472">
                 <a:extLst>
                   <a:ext uri="{FF2B5EF4-FFF2-40B4-BE49-F238E27FC236}">
-                    <a16:creationId xmlns:a16="http://schemas.microsoft.com/office/drawing/2014/main" id="{43E55604-EB78-4739-F238-50B201DDC581}"/>
+                    <a16:creationId xmlns:a16="http://schemas.microsoft.com/office/drawing/2014/main" id="{A0C386D9-01ED-BB1D-620A-C0B93510FE9B}"/>
                   </a:ext>
                 </a:extLst>
               </p:cNvPr>
@@ -18941,10 +18747,10 @@
           </p:sp>
           <p:sp>
             <p:nvSpPr>
-              <p:cNvPr id="49" name="Téglalap 48">
+              <p:cNvPr id="474" name="Téglalap 473">
                 <a:extLst>
                   <a:ext uri="{FF2B5EF4-FFF2-40B4-BE49-F238E27FC236}">
-                    <a16:creationId xmlns:a16="http://schemas.microsoft.com/office/drawing/2014/main" id="{138DCCB1-4D4E-F345-6FD1-C9C55CF39CFA}"/>
+                    <a16:creationId xmlns:a16="http://schemas.microsoft.com/office/drawing/2014/main" id="{DD13875D-65D5-D91F-5AD2-7B7D008BFB84}"/>
                   </a:ext>
                 </a:extLst>
               </p:cNvPr>
@@ -18994,10 +18800,10 @@
         </p:grpSp>
         <p:grpSp>
           <p:nvGrpSpPr>
-            <p:cNvPr id="36" name="Csoportba foglalás 35">
+            <p:cNvPr id="461" name="Csoportba foglalás 460">
               <a:extLst>
                 <a:ext uri="{FF2B5EF4-FFF2-40B4-BE49-F238E27FC236}">
-                  <a16:creationId xmlns:a16="http://schemas.microsoft.com/office/drawing/2014/main" id="{9CFF56A1-E601-3DB9-A89D-39D67AEC8701}"/>
+                  <a16:creationId xmlns:a16="http://schemas.microsoft.com/office/drawing/2014/main" id="{F98A15F9-E820-5047-0F9D-20E0AF5B4E56}"/>
                 </a:ext>
               </a:extLst>
             </p:cNvPr>
@@ -19014,10 +18820,10 @@
           </p:grpSpPr>
           <p:sp>
             <p:nvSpPr>
-              <p:cNvPr id="43" name="Téglalap 42">
+              <p:cNvPr id="468" name="Téglalap 467">
                 <a:extLst>
                   <a:ext uri="{FF2B5EF4-FFF2-40B4-BE49-F238E27FC236}">
-                    <a16:creationId xmlns:a16="http://schemas.microsoft.com/office/drawing/2014/main" id="{916D7F97-8257-AA74-90A2-FAE63E71F352}"/>
+                    <a16:creationId xmlns:a16="http://schemas.microsoft.com/office/drawing/2014/main" id="{0B9BC5F8-8BE1-4893-0635-9CA9201F42DE}"/>
                   </a:ext>
                 </a:extLst>
               </p:cNvPr>
@@ -19066,10 +18872,10 @@
           </p:sp>
           <p:sp>
             <p:nvSpPr>
-              <p:cNvPr id="44" name="Szövegdoboz 43">
+              <p:cNvPr id="469" name="Szövegdoboz 468">
                 <a:extLst>
                   <a:ext uri="{FF2B5EF4-FFF2-40B4-BE49-F238E27FC236}">
-                    <a16:creationId xmlns:a16="http://schemas.microsoft.com/office/drawing/2014/main" id="{AC93553E-AF47-F5A9-8F47-641DB8F2E5AE}"/>
+                    <a16:creationId xmlns:a16="http://schemas.microsoft.com/office/drawing/2014/main" id="{73ED1A26-8ADB-E495-3D47-D22CE6AB543C}"/>
                   </a:ext>
                 </a:extLst>
               </p:cNvPr>
@@ -19129,10 +18935,10 @@
           </p:sp>
           <p:sp>
             <p:nvSpPr>
-              <p:cNvPr id="45" name="Szövegdoboz 44">
+              <p:cNvPr id="470" name="Szövegdoboz 469">
                 <a:extLst>
                   <a:ext uri="{FF2B5EF4-FFF2-40B4-BE49-F238E27FC236}">
-                    <a16:creationId xmlns:a16="http://schemas.microsoft.com/office/drawing/2014/main" id="{CC518DF7-1178-17BD-F91D-70748898D2DA}"/>
+                    <a16:creationId xmlns:a16="http://schemas.microsoft.com/office/drawing/2014/main" id="{6B95CE1B-E394-8F90-8224-80FE2EE3DB70}"/>
                   </a:ext>
                 </a:extLst>
               </p:cNvPr>
@@ -19169,10 +18975,10 @@
           </p:sp>
           <p:sp>
             <p:nvSpPr>
-              <p:cNvPr id="46" name="Szövegdoboz 45">
+              <p:cNvPr id="471" name="Szövegdoboz 470">
                 <a:extLst>
                   <a:ext uri="{FF2B5EF4-FFF2-40B4-BE49-F238E27FC236}">
-                    <a16:creationId xmlns:a16="http://schemas.microsoft.com/office/drawing/2014/main" id="{333D3B3A-50FF-9264-ADFF-6A0FBBDF4943}"/>
+                    <a16:creationId xmlns:a16="http://schemas.microsoft.com/office/drawing/2014/main" id="{69F1EAC6-E307-11DC-0017-7BE31966EBA3}"/>
                   </a:ext>
                 </a:extLst>
               </p:cNvPr>
@@ -19210,10 +19016,10 @@
         </p:grpSp>
         <p:grpSp>
           <p:nvGrpSpPr>
-            <p:cNvPr id="37" name="Csoportba foglalás 36">
+            <p:cNvPr id="462" name="Csoportba foglalás 461">
               <a:extLst>
                 <a:ext uri="{FF2B5EF4-FFF2-40B4-BE49-F238E27FC236}">
-                  <a16:creationId xmlns:a16="http://schemas.microsoft.com/office/drawing/2014/main" id="{3E41A5B6-AF57-D2BE-40C8-2EAA5BA2CEAC}"/>
+                  <a16:creationId xmlns:a16="http://schemas.microsoft.com/office/drawing/2014/main" id="{AA234E51-A139-25D4-ECD9-36435FC70606}"/>
                 </a:ext>
               </a:extLst>
             </p:cNvPr>
@@ -19230,10 +19036,10 @@
           </p:grpSpPr>
           <p:grpSp>
             <p:nvGrpSpPr>
-              <p:cNvPr id="38" name="Csoportba foglalás 37">
+              <p:cNvPr id="463" name="Csoportba foglalás 462">
                 <a:extLst>
                   <a:ext uri="{FF2B5EF4-FFF2-40B4-BE49-F238E27FC236}">
-                    <a16:creationId xmlns:a16="http://schemas.microsoft.com/office/drawing/2014/main" id="{C2CC90CF-22C1-84FA-410C-59235A8DB3F3}"/>
+                    <a16:creationId xmlns:a16="http://schemas.microsoft.com/office/drawing/2014/main" id="{7209580B-2316-0EF1-1F95-1BDE01623A82}"/>
                   </a:ext>
                 </a:extLst>
               </p:cNvPr>
@@ -19250,10 +19056,10 @@
             </p:grpSpPr>
             <p:sp>
               <p:nvSpPr>
-                <p:cNvPr id="40" name="Szövegdoboz 39">
+                <p:cNvPr id="465" name="Szövegdoboz 464">
                   <a:extLst>
                     <a:ext uri="{FF2B5EF4-FFF2-40B4-BE49-F238E27FC236}">
-                      <a16:creationId xmlns:a16="http://schemas.microsoft.com/office/drawing/2014/main" id="{67C67EB3-644F-6629-8896-238C0662B0F2}"/>
+                      <a16:creationId xmlns:a16="http://schemas.microsoft.com/office/drawing/2014/main" id="{DF7CDFA2-F157-518D-3750-07CB8C645092}"/>
                     </a:ext>
                   </a:extLst>
                 </p:cNvPr>
@@ -19290,10 +19096,10 @@
             </p:sp>
             <p:sp>
               <p:nvSpPr>
-                <p:cNvPr id="41" name="Szövegdoboz 40">
+                <p:cNvPr id="466" name="Szövegdoboz 465">
                   <a:extLst>
                     <a:ext uri="{FF2B5EF4-FFF2-40B4-BE49-F238E27FC236}">
-                      <a16:creationId xmlns:a16="http://schemas.microsoft.com/office/drawing/2014/main" id="{189C1069-AFD2-848C-F9F8-3C44D6621E1B}"/>
+                      <a16:creationId xmlns:a16="http://schemas.microsoft.com/office/drawing/2014/main" id="{9084035E-DB16-8E16-2AB2-80887E54D5FF}"/>
                     </a:ext>
                   </a:extLst>
                 </p:cNvPr>
@@ -19330,10 +19136,10 @@
             </p:sp>
             <p:sp>
               <p:nvSpPr>
-                <p:cNvPr id="42" name="Téglalap 41">
+                <p:cNvPr id="467" name="Téglalap 466">
                   <a:extLst>
                     <a:ext uri="{FF2B5EF4-FFF2-40B4-BE49-F238E27FC236}">
-                      <a16:creationId xmlns:a16="http://schemas.microsoft.com/office/drawing/2014/main" id="{F2F93AD4-CD1E-407F-0B08-F169F7E0F7D2}"/>
+                      <a16:creationId xmlns:a16="http://schemas.microsoft.com/office/drawing/2014/main" id="{16C83F22-4EF7-9AE8-BDC8-08088D868481}"/>
                     </a:ext>
                   </a:extLst>
                 </p:cNvPr>
@@ -19386,10 +19192,10 @@
           </p:grpSp>
           <p:sp>
             <p:nvSpPr>
-              <p:cNvPr id="39" name="Téglalap 38">
+              <p:cNvPr id="464" name="Téglalap 463">
                 <a:extLst>
                   <a:ext uri="{FF2B5EF4-FFF2-40B4-BE49-F238E27FC236}">
-                    <a16:creationId xmlns:a16="http://schemas.microsoft.com/office/drawing/2014/main" id="{FAB3A65C-99DC-DA96-D783-ADC85A51B9D7}"/>
+                    <a16:creationId xmlns:a16="http://schemas.microsoft.com/office/drawing/2014/main" id="{A0D69956-A3D3-567E-8584-15E5D340DAF1}"/>
                   </a:ext>
                 </a:extLst>
               </p:cNvPr>
@@ -19440,204 +19246,10 @@
       </p:grpSp>
       <p:sp>
         <p:nvSpPr>
-          <p:cNvPr id="50" name="Ellipszis 49">
+          <p:cNvPr id="475" name="Szövegdoboz 474">
             <a:extLst>
               <a:ext uri="{FF2B5EF4-FFF2-40B4-BE49-F238E27FC236}">
-                <a16:creationId xmlns:a16="http://schemas.microsoft.com/office/drawing/2014/main" id="{933F8E5C-6B4F-93EE-DF7D-2FA9DBE658D1}"/>
-              </a:ext>
-            </a:extLst>
-          </p:cNvPr>
-          <p:cNvSpPr/>
-          <p:nvPr/>
-        </p:nvSpPr>
-        <p:spPr>
-          <a:xfrm>
-            <a:off x="16435459" y="2538222"/>
-            <a:ext cx="2663901" cy="2663901"/>
-          </a:xfrm>
-          <a:prstGeom prst="ellipse">
-            <a:avLst/>
-          </a:prstGeom>
-          <a:solidFill>
-            <a:srgbClr val="FFFF00"/>
-          </a:solidFill>
-          <a:ln>
-            <a:noFill/>
-          </a:ln>
-        </p:spPr>
-        <p:style>
-          <a:lnRef idx="2">
-            <a:schemeClr val="accent1">
-              <a:shade val="15000"/>
-            </a:schemeClr>
-          </a:lnRef>
-          <a:fillRef idx="1">
-            <a:schemeClr val="accent1"/>
-          </a:fillRef>
-          <a:effectRef idx="0">
-            <a:schemeClr val="accent1"/>
-          </a:effectRef>
-          <a:fontRef idx="minor">
-            <a:schemeClr val="lt1"/>
-          </a:fontRef>
-        </p:style>
-        <p:txBody>
-          <a:bodyPr rtlCol="0" anchor="ctr"/>
-          <a:lstStyle/>
-          <a:p>
-            <a:pPr algn="ctr"/>
-            <a:endParaRPr lang="hu-HU" dirty="0"/>
-          </a:p>
-        </p:txBody>
-      </p:sp>
-      <p:sp>
-        <p:nvSpPr>
-          <p:cNvPr id="51" name="Körcikk 50">
-            <a:extLst>
-              <a:ext uri="{FF2B5EF4-FFF2-40B4-BE49-F238E27FC236}">
-                <a16:creationId xmlns:a16="http://schemas.microsoft.com/office/drawing/2014/main" id="{BDA5A859-E850-96D1-61C5-3167C5357A78}"/>
-              </a:ext>
-            </a:extLst>
-          </p:cNvPr>
-          <p:cNvSpPr/>
-          <p:nvPr/>
-        </p:nvSpPr>
-        <p:spPr>
-          <a:xfrm>
-            <a:off x="16436153" y="2538916"/>
-            <a:ext cx="2662512" cy="2662512"/>
-          </a:xfrm>
-          <a:prstGeom prst="pie">
-            <a:avLst/>
-          </a:prstGeom>
-          <a:solidFill>
-            <a:schemeClr val="tx2">
-              <a:lumMod val="75000"/>
-              <a:lumOff val="25000"/>
-            </a:schemeClr>
-          </a:solidFill>
-          <a:ln>
-            <a:noFill/>
-          </a:ln>
-        </p:spPr>
-        <p:style>
-          <a:lnRef idx="2">
-            <a:schemeClr val="accent1">
-              <a:shade val="15000"/>
-            </a:schemeClr>
-          </a:lnRef>
-          <a:fillRef idx="1">
-            <a:schemeClr val="accent1"/>
-          </a:fillRef>
-          <a:effectRef idx="0">
-            <a:schemeClr val="accent1"/>
-          </a:effectRef>
-          <a:fontRef idx="minor">
-            <a:schemeClr val="lt1"/>
-          </a:fontRef>
-        </p:style>
-        <p:txBody>
-          <a:bodyPr rtlCol="0" anchor="ctr"/>
-          <a:lstStyle/>
-          <a:p>
-            <a:pPr algn="ctr"/>
-            <a:endParaRPr lang="hu-HU">
-              <a:solidFill>
-                <a:schemeClr val="tx1"/>
-              </a:solidFill>
-            </a:endParaRPr>
-          </a:p>
-        </p:txBody>
-      </p:sp>
-      <p:sp>
-        <p:nvSpPr>
-          <p:cNvPr id="52" name="Szövegdoboz 51">
-            <a:extLst>
-              <a:ext uri="{FF2B5EF4-FFF2-40B4-BE49-F238E27FC236}">
-                <a16:creationId xmlns:a16="http://schemas.microsoft.com/office/drawing/2014/main" id="{249D0BAE-1024-086C-0810-B4F2CA361DBC}"/>
-              </a:ext>
-            </a:extLst>
-          </p:cNvPr>
-          <p:cNvSpPr txBox="1"/>
-          <p:nvPr/>
-        </p:nvSpPr>
-        <p:spPr>
-          <a:xfrm>
-            <a:off x="16778878" y="4109882"/>
-            <a:ext cx="1607880" cy="369332"/>
-          </a:xfrm>
-          <a:prstGeom prst="rect">
-            <a:avLst/>
-          </a:prstGeom>
-          <a:noFill/>
-        </p:spPr>
-        <p:txBody>
-          <a:bodyPr wrap="square" rtlCol="0">
-            <a:spAutoFit/>
-          </a:bodyPr>
-          <a:lstStyle/>
-          <a:p>
-            <a:r>
-              <a:rPr lang="hu-HU" dirty="0">
-                <a:solidFill>
-                  <a:schemeClr val="bg1"/>
-                </a:solidFill>
-                <a:latin typeface="Arial Black" panose="020B0A04020102020204" pitchFamily="34" charset="0"/>
-              </a:rPr>
-              <a:t>75%</a:t>
-            </a:r>
-          </a:p>
-        </p:txBody>
-      </p:sp>
-      <p:sp>
-        <p:nvSpPr>
-          <p:cNvPr id="53" name="Szövegdoboz 52">
-            <a:extLst>
-              <a:ext uri="{FF2B5EF4-FFF2-40B4-BE49-F238E27FC236}">
-                <a16:creationId xmlns:a16="http://schemas.microsoft.com/office/drawing/2014/main" id="{63C94966-326E-E1F0-7265-01E933D626E4}"/>
-              </a:ext>
-            </a:extLst>
-          </p:cNvPr>
-          <p:cNvSpPr txBox="1"/>
-          <p:nvPr/>
-        </p:nvSpPr>
-        <p:spPr>
-          <a:xfrm>
-            <a:off x="18012089" y="3164751"/>
-            <a:ext cx="1607880" cy="369332"/>
-          </a:xfrm>
-          <a:prstGeom prst="rect">
-            <a:avLst/>
-          </a:prstGeom>
-          <a:noFill/>
-        </p:spPr>
-        <p:txBody>
-          <a:bodyPr wrap="square" rtlCol="0">
-            <a:spAutoFit/>
-          </a:bodyPr>
-          <a:lstStyle/>
-          <a:p>
-            <a:r>
-              <a:rPr lang="hu-HU" dirty="0">
-                <a:solidFill>
-                  <a:schemeClr val="tx1">
-                    <a:lumMod val="85000"/>
-                    <a:lumOff val="15000"/>
-                  </a:schemeClr>
-                </a:solidFill>
-                <a:latin typeface="Arial Black" panose="020B0A04020102020204" pitchFamily="34" charset="0"/>
-              </a:rPr>
-              <a:t>25%</a:t>
-            </a:r>
-          </a:p>
-        </p:txBody>
-      </p:sp>
-      <p:sp>
-        <p:nvSpPr>
-          <p:cNvPr id="54" name="Szövegdoboz 53">
-            <a:extLst>
-              <a:ext uri="{FF2B5EF4-FFF2-40B4-BE49-F238E27FC236}">
-                <a16:creationId xmlns:a16="http://schemas.microsoft.com/office/drawing/2014/main" id="{19D943A3-7795-801F-5014-054D99AB9288}"/>
+                <a16:creationId xmlns:a16="http://schemas.microsoft.com/office/drawing/2014/main" id="{6CC2131D-1519-8908-C0B5-F66D6F4FA5DB}"/>
               </a:ext>
             </a:extLst>
           </p:cNvPr>
@@ -19687,7 +19299,204 @@
                 </a:solidFill>
                 <a:latin typeface="Arial Black" panose="020B0A04020102020204" pitchFamily="34" charset="0"/>
               </a:rPr>
-              <a:t>25%</a:t>
+              <a:t>30.4%</a:t>
+            </a:r>
+          </a:p>
+        </p:txBody>
+      </p:sp>
+      <p:sp>
+        <p:nvSpPr>
+          <p:cNvPr id="477" name="Ellipszis 476">
+            <a:extLst>
+              <a:ext uri="{FF2B5EF4-FFF2-40B4-BE49-F238E27FC236}">
+                <a16:creationId xmlns:a16="http://schemas.microsoft.com/office/drawing/2014/main" id="{EA32A813-9D61-C833-34E3-019322DCC69D}"/>
+              </a:ext>
+            </a:extLst>
+          </p:cNvPr>
+          <p:cNvSpPr/>
+          <p:nvPr/>
+        </p:nvSpPr>
+        <p:spPr>
+          <a:xfrm>
+            <a:off x="16460341" y="2524500"/>
+            <a:ext cx="2663901" cy="2663901"/>
+          </a:xfrm>
+          <a:prstGeom prst="ellipse">
+            <a:avLst/>
+          </a:prstGeom>
+          <a:solidFill>
+            <a:srgbClr val="FFFF00"/>
+          </a:solidFill>
+          <a:ln>
+            <a:noFill/>
+          </a:ln>
+        </p:spPr>
+        <p:style>
+          <a:lnRef idx="2">
+            <a:schemeClr val="accent1">
+              <a:shade val="15000"/>
+            </a:schemeClr>
+          </a:lnRef>
+          <a:fillRef idx="1">
+            <a:schemeClr val="accent1"/>
+          </a:fillRef>
+          <a:effectRef idx="0">
+            <a:schemeClr val="accent1"/>
+          </a:effectRef>
+          <a:fontRef idx="minor">
+            <a:schemeClr val="lt1"/>
+          </a:fontRef>
+        </p:style>
+        <p:txBody>
+          <a:bodyPr rtlCol="0" anchor="ctr"/>
+          <a:lstStyle/>
+          <a:p>
+            <a:pPr algn="ctr"/>
+            <a:endParaRPr lang="hu-HU" dirty="0"/>
+          </a:p>
+        </p:txBody>
+      </p:sp>
+      <p:sp>
+        <p:nvSpPr>
+          <p:cNvPr id="479" name="Körcikk 478">
+            <a:extLst>
+              <a:ext uri="{FF2B5EF4-FFF2-40B4-BE49-F238E27FC236}">
+                <a16:creationId xmlns:a16="http://schemas.microsoft.com/office/drawing/2014/main" id="{77C692A3-FD11-4CDF-428B-88A071743977}"/>
+              </a:ext>
+            </a:extLst>
+          </p:cNvPr>
+          <p:cNvSpPr/>
+          <p:nvPr/>
+        </p:nvSpPr>
+        <p:spPr>
+          <a:xfrm>
+            <a:off x="16461035" y="2525194"/>
+            <a:ext cx="2662512" cy="2662512"/>
+          </a:xfrm>
+          <a:prstGeom prst="pie">
+            <a:avLst>
+              <a:gd name="adj1" fmla="val 4260411"/>
+              <a:gd name="adj2" fmla="val 16200000"/>
+            </a:avLst>
+          </a:prstGeom>
+          <a:solidFill>
+            <a:schemeClr val="tx2">
+              <a:lumMod val="75000"/>
+              <a:lumOff val="25000"/>
+            </a:schemeClr>
+          </a:solidFill>
+          <a:ln>
+            <a:noFill/>
+          </a:ln>
+        </p:spPr>
+        <p:style>
+          <a:lnRef idx="2">
+            <a:schemeClr val="accent1">
+              <a:shade val="15000"/>
+            </a:schemeClr>
+          </a:lnRef>
+          <a:fillRef idx="1">
+            <a:schemeClr val="accent1"/>
+          </a:fillRef>
+          <a:effectRef idx="0">
+            <a:schemeClr val="accent1"/>
+          </a:effectRef>
+          <a:fontRef idx="minor">
+            <a:schemeClr val="lt1"/>
+          </a:fontRef>
+        </p:style>
+        <p:txBody>
+          <a:bodyPr rtlCol="0" anchor="ctr"/>
+          <a:lstStyle/>
+          <a:p>
+            <a:pPr algn="ctr"/>
+            <a:endParaRPr lang="hu-HU">
+              <a:solidFill>
+                <a:schemeClr val="tx1"/>
+              </a:solidFill>
+            </a:endParaRPr>
+          </a:p>
+        </p:txBody>
+      </p:sp>
+      <p:sp>
+        <p:nvSpPr>
+          <p:cNvPr id="481" name="Szövegdoboz 480">
+            <a:extLst>
+              <a:ext uri="{FF2B5EF4-FFF2-40B4-BE49-F238E27FC236}">
+                <a16:creationId xmlns:a16="http://schemas.microsoft.com/office/drawing/2014/main" id="{5FE9B3B1-634A-1EE7-3571-CCCF57A68E10}"/>
+              </a:ext>
+            </a:extLst>
+          </p:cNvPr>
+          <p:cNvSpPr txBox="1"/>
+          <p:nvPr/>
+        </p:nvSpPr>
+        <p:spPr>
+          <a:xfrm>
+            <a:off x="16716071" y="3834139"/>
+            <a:ext cx="1607880" cy="369332"/>
+          </a:xfrm>
+          <a:prstGeom prst="rect">
+            <a:avLst/>
+          </a:prstGeom>
+          <a:noFill/>
+        </p:spPr>
+        <p:txBody>
+          <a:bodyPr wrap="square" rtlCol="0">
+            <a:spAutoFit/>
+          </a:bodyPr>
+          <a:lstStyle/>
+          <a:p>
+            <a:r>
+              <a:rPr lang="hu-HU" dirty="0">
+                <a:solidFill>
+                  <a:schemeClr val="bg1"/>
+                </a:solidFill>
+                <a:latin typeface="Arial Black" panose="020B0A04020102020204" pitchFamily="34" charset="0"/>
+              </a:rPr>
+              <a:t>55%</a:t>
+            </a:r>
+          </a:p>
+        </p:txBody>
+      </p:sp>
+      <p:sp>
+        <p:nvSpPr>
+          <p:cNvPr id="483" name="Szövegdoboz 482">
+            <a:extLst>
+              <a:ext uri="{FF2B5EF4-FFF2-40B4-BE49-F238E27FC236}">
+                <a16:creationId xmlns:a16="http://schemas.microsoft.com/office/drawing/2014/main" id="{F4361DC2-432A-5223-39A4-2C79D683E200}"/>
+              </a:ext>
+            </a:extLst>
+          </p:cNvPr>
+          <p:cNvSpPr txBox="1"/>
+          <p:nvPr/>
+        </p:nvSpPr>
+        <p:spPr>
+          <a:xfrm>
+            <a:off x="18176870" y="3571137"/>
+            <a:ext cx="1607880" cy="369332"/>
+          </a:xfrm>
+          <a:prstGeom prst="rect">
+            <a:avLst/>
+          </a:prstGeom>
+          <a:noFill/>
+        </p:spPr>
+        <p:txBody>
+          <a:bodyPr wrap="square" rtlCol="0">
+            <a:spAutoFit/>
+          </a:bodyPr>
+          <a:lstStyle/>
+          <a:p>
+            <a:r>
+              <a:rPr lang="hu-HU" dirty="0">
+                <a:solidFill>
+                  <a:schemeClr val="tx1">
+                    <a:lumMod val="85000"/>
+                    <a:lumOff val="15000"/>
+                  </a:schemeClr>
+                </a:solidFill>
+                <a:latin typeface="Arial Black" panose="020B0A04020102020204" pitchFamily="34" charset="0"/>
+              </a:rPr>
+              <a:t>45%</a:t>
             </a:r>
           </a:p>
         </p:txBody>
@@ -21598,7 +21407,10 @@
             <a:ext cx="2662512" cy="2662512"/>
           </a:xfrm>
           <a:prstGeom prst="pie">
-            <a:avLst/>
+            <a:avLst>
+              <a:gd name="adj1" fmla="val 4260411"/>
+              <a:gd name="adj2" fmla="val 16200000"/>
+            </a:avLst>
           </a:prstGeom>
           <a:solidFill>
             <a:schemeClr val="tx2">
@@ -21653,7 +21465,7 @@
         </p:nvSpPr>
         <p:spPr>
           <a:xfrm>
-            <a:off x="8901489" y="4109883"/>
+            <a:off x="8813800" y="3847862"/>
             <a:ext cx="1607880" cy="369332"/>
           </a:xfrm>
           <a:prstGeom prst="rect">
@@ -21674,7 +21486,7 @@
                 </a:solidFill>
                 <a:latin typeface="Arial Black" panose="020B0A04020102020204" pitchFamily="34" charset="0"/>
               </a:rPr>
-              <a:t>75%</a:t>
+              <a:t>55%</a:t>
             </a:r>
           </a:p>
         </p:txBody>
@@ -21693,7 +21505,7 @@
         </p:nvSpPr>
         <p:spPr>
           <a:xfrm>
-            <a:off x="10134700" y="3164752"/>
+            <a:off x="10274599" y="3584860"/>
             <a:ext cx="1607880" cy="369332"/>
           </a:xfrm>
           <a:prstGeom prst="rect">
@@ -21717,7 +21529,7 @@
                 </a:solidFill>
                 <a:latin typeface="Arial Black" panose="020B0A04020102020204" pitchFamily="34" charset="0"/>
               </a:rPr>
-              <a:t>25%</a:t>
+              <a:t>45%</a:t>
             </a:r>
           </a:p>
         </p:txBody>
@@ -21777,17 +21589,17 @@
                 </a:solidFill>
                 <a:latin typeface="Arial Black" panose="020B0A04020102020204" pitchFamily="34" charset="0"/>
               </a:rPr>
-              <a:t>25%</a:t>
+              <a:t>30.4%</a:t>
             </a:r>
           </a:p>
         </p:txBody>
       </p:sp>
       <p:grpSp>
         <p:nvGrpSpPr>
-          <p:cNvPr id="2" name="Csoportba foglalás 1">
+          <p:cNvPr id="28" name="Csoportba foglalás 27">
             <a:extLst>
               <a:ext uri="{FF2B5EF4-FFF2-40B4-BE49-F238E27FC236}">
-                <a16:creationId xmlns:a16="http://schemas.microsoft.com/office/drawing/2014/main" id="{413B87E0-6F3B-F9BD-482B-1A98DBA05CF2}"/>
+                <a16:creationId xmlns:a16="http://schemas.microsoft.com/office/drawing/2014/main" id="{168881AD-04F8-3405-D804-34F937EA5728}"/>
               </a:ext>
             </a:extLst>
           </p:cNvPr>
@@ -21804,10 +21616,10 @@
         </p:grpSpPr>
         <p:sp>
           <p:nvSpPr>
-            <p:cNvPr id="4" name="Téglalap 3">
+            <p:cNvPr id="29" name="Téglalap 28">
               <a:extLst>
                 <a:ext uri="{FF2B5EF4-FFF2-40B4-BE49-F238E27FC236}">
-                  <a16:creationId xmlns:a16="http://schemas.microsoft.com/office/drawing/2014/main" id="{10530DEA-7754-675A-6B56-0B51D6EDD0B9}"/>
+                  <a16:creationId xmlns:a16="http://schemas.microsoft.com/office/drawing/2014/main" id="{77E6879B-9B35-B467-DC35-171540898DF8}"/>
                 </a:ext>
               </a:extLst>
             </p:cNvPr>
@@ -21859,10 +21671,10 @@
         </p:sp>
         <p:sp>
           <p:nvSpPr>
-            <p:cNvPr id="5" name="Szövegdoboz 4">
+            <p:cNvPr id="30" name="Szövegdoboz 29">
               <a:extLst>
                 <a:ext uri="{FF2B5EF4-FFF2-40B4-BE49-F238E27FC236}">
-                  <a16:creationId xmlns:a16="http://schemas.microsoft.com/office/drawing/2014/main" id="{6E0BBB53-5545-7925-FD31-505A85E29069}"/>
+                  <a16:creationId xmlns:a16="http://schemas.microsoft.com/office/drawing/2014/main" id="{9EB36720-D764-AD5D-1DDB-0A2B92742D05}"/>
                 </a:ext>
               </a:extLst>
             </p:cNvPr>
@@ -21907,10 +21719,10 @@
         </p:sp>
         <p:sp>
           <p:nvSpPr>
-            <p:cNvPr id="7" name="Téglalap 6">
+            <p:cNvPr id="31" name="Téglalap 30">
               <a:extLst>
                 <a:ext uri="{FF2B5EF4-FFF2-40B4-BE49-F238E27FC236}">
-                  <a16:creationId xmlns:a16="http://schemas.microsoft.com/office/drawing/2014/main" id="{2F15EBFF-8AD8-7F0A-A7D3-3A0C291E5F88}"/>
+                  <a16:creationId xmlns:a16="http://schemas.microsoft.com/office/drawing/2014/main" id="{F5469C4B-7110-5C77-C3ED-57AD2D744237}"/>
                 </a:ext>
               </a:extLst>
             </p:cNvPr>
@@ -21963,10 +21775,10 @@
       </p:grpSp>
       <p:sp>
         <p:nvSpPr>
-          <p:cNvPr id="9" name="Szövegdoboz 8">
+          <p:cNvPr id="32" name="Szövegdoboz 31">
             <a:extLst>
               <a:ext uri="{FF2B5EF4-FFF2-40B4-BE49-F238E27FC236}">
-                <a16:creationId xmlns:a16="http://schemas.microsoft.com/office/drawing/2014/main" id="{D2125F35-A6E8-95FA-3FE4-E0894DE854A9}"/>
+                <a16:creationId xmlns:a16="http://schemas.microsoft.com/office/drawing/2014/main" id="{F802E2CF-654A-2D1D-6649-DD8643327734}"/>
               </a:ext>
             </a:extLst>
           </p:cNvPr>
@@ -22003,10 +21815,10 @@
       </p:sp>
       <p:sp>
         <p:nvSpPr>
-          <p:cNvPr id="11" name="Szövegdoboz 10">
+          <p:cNvPr id="33" name="Szövegdoboz 32">
             <a:extLst>
               <a:ext uri="{FF2B5EF4-FFF2-40B4-BE49-F238E27FC236}">
-                <a16:creationId xmlns:a16="http://schemas.microsoft.com/office/drawing/2014/main" id="{02D37F37-30C9-B38E-827A-D054BEFB6712}"/>
+                <a16:creationId xmlns:a16="http://schemas.microsoft.com/office/drawing/2014/main" id="{691A5562-681C-77E2-C5D8-29185C1A6C19}"/>
               </a:ext>
             </a:extLst>
           </p:cNvPr>
@@ -22043,10 +21855,10 @@
       </p:sp>
       <p:sp>
         <p:nvSpPr>
-          <p:cNvPr id="14" name="Téglalap 13">
+          <p:cNvPr id="34" name="Téglalap 33">
             <a:extLst>
               <a:ext uri="{FF2B5EF4-FFF2-40B4-BE49-F238E27FC236}">
-                <a16:creationId xmlns:a16="http://schemas.microsoft.com/office/drawing/2014/main" id="{6A299383-3F6B-D4FB-961A-04A7109B919B}"/>
+                <a16:creationId xmlns:a16="http://schemas.microsoft.com/office/drawing/2014/main" id="{E8062C08-438D-EB74-3492-6F8EE5DCB9F8}"/>
               </a:ext>
             </a:extLst>
           </p:cNvPr>
@@ -22106,10 +21918,10 @@
       </p:sp>
       <p:sp>
         <p:nvSpPr>
-          <p:cNvPr id="18" name="Téglalap 17">
+          <p:cNvPr id="35" name="Téglalap 34">
             <a:extLst>
               <a:ext uri="{FF2B5EF4-FFF2-40B4-BE49-F238E27FC236}">
-                <a16:creationId xmlns:a16="http://schemas.microsoft.com/office/drawing/2014/main" id="{81E58111-023B-6AED-8F42-7429DD060394}"/>
+                <a16:creationId xmlns:a16="http://schemas.microsoft.com/office/drawing/2014/main" id="{4E8E9AC2-BF9A-6761-3D6E-DA801BA01A28}"/>
               </a:ext>
             </a:extLst>
           </p:cNvPr>
@@ -22169,10 +21981,10 @@
       </p:sp>
       <p:sp>
         <p:nvSpPr>
-          <p:cNvPr id="20" name="Szövegdoboz 19">
+          <p:cNvPr id="36" name="Szövegdoboz 35">
             <a:extLst>
               <a:ext uri="{FF2B5EF4-FFF2-40B4-BE49-F238E27FC236}">
-                <a16:creationId xmlns:a16="http://schemas.microsoft.com/office/drawing/2014/main" id="{8EEA4714-D778-7ACC-63CC-367A89F386A1}"/>
+                <a16:creationId xmlns:a16="http://schemas.microsoft.com/office/drawing/2014/main" id="{977FD10B-1B7E-1CAD-D8C9-5C292ECD95C3}"/>
               </a:ext>
             </a:extLst>
           </p:cNvPr>
@@ -24106,17 +23918,17 @@
                 </a:solidFill>
                 <a:latin typeface="Arial Black" panose="020B0A04020102020204" pitchFamily="34" charset="0"/>
               </a:rPr>
-              <a:t>25%</a:t>
+              <a:t>30.4%</a:t>
             </a:r>
           </a:p>
         </p:txBody>
       </p:sp>
       <p:sp>
         <p:nvSpPr>
-          <p:cNvPr id="4" name="Ellipszis 3">
+          <p:cNvPr id="5" name="Ellipszis 4">
             <a:extLst>
               <a:ext uri="{FF2B5EF4-FFF2-40B4-BE49-F238E27FC236}">
-                <a16:creationId xmlns:a16="http://schemas.microsoft.com/office/drawing/2014/main" id="{84E6D46A-2EF4-EA7A-784E-B3031795C0FA}"/>
+                <a16:creationId xmlns:a16="http://schemas.microsoft.com/office/drawing/2014/main" id="{EBFDCCDB-9567-097B-B1DA-9FE0BEDEF4B5}"/>
               </a:ext>
             </a:extLst>
           </p:cNvPr>
@@ -24125,7 +23937,7 @@
         </p:nvSpPr>
         <p:spPr>
           <a:xfrm>
-            <a:off x="12893904" y="2516228"/>
+            <a:off x="16460341" y="2524500"/>
             <a:ext cx="2663901" cy="2663901"/>
           </a:xfrm>
           <a:prstGeom prst="ellipse">
@@ -24165,10 +23977,10 @@
       </p:sp>
       <p:sp>
         <p:nvSpPr>
-          <p:cNvPr id="7" name="Körcikk 6">
+          <p:cNvPr id="14" name="Körcikk 13">
             <a:extLst>
               <a:ext uri="{FF2B5EF4-FFF2-40B4-BE49-F238E27FC236}">
-                <a16:creationId xmlns:a16="http://schemas.microsoft.com/office/drawing/2014/main" id="{5BA5ACAD-751E-EC5C-EF44-2983F1634C42}"/>
+                <a16:creationId xmlns:a16="http://schemas.microsoft.com/office/drawing/2014/main" id="{485B6B58-93F9-A3D9-AECC-DD97966EB6C6}"/>
               </a:ext>
             </a:extLst>
           </p:cNvPr>
@@ -24177,11 +23989,14 @@
         </p:nvSpPr>
         <p:spPr>
           <a:xfrm>
-            <a:off x="12894598" y="2516922"/>
+            <a:off x="16461035" y="2525194"/>
             <a:ext cx="2662512" cy="2662512"/>
           </a:xfrm>
           <a:prstGeom prst="pie">
-            <a:avLst/>
+            <a:avLst>
+              <a:gd name="adj1" fmla="val 4260411"/>
+              <a:gd name="adj2" fmla="val 16200000"/>
+            </a:avLst>
           </a:prstGeom>
           <a:solidFill>
             <a:schemeClr val="tx2">
@@ -24224,10 +24039,10 @@
       </p:sp>
       <p:sp>
         <p:nvSpPr>
-          <p:cNvPr id="11" name="Szövegdoboz 10">
+          <p:cNvPr id="22" name="Szövegdoboz 21">
             <a:extLst>
               <a:ext uri="{FF2B5EF4-FFF2-40B4-BE49-F238E27FC236}">
-                <a16:creationId xmlns:a16="http://schemas.microsoft.com/office/drawing/2014/main" id="{731418BB-5C52-1E66-3200-80144B5EDF87}"/>
+                <a16:creationId xmlns:a16="http://schemas.microsoft.com/office/drawing/2014/main" id="{6337DAF6-3FFA-AF65-CC0B-34CA1AAD426F}"/>
               </a:ext>
             </a:extLst>
           </p:cNvPr>
@@ -24236,7 +24051,7 @@
         </p:nvSpPr>
         <p:spPr>
           <a:xfrm>
-            <a:off x="13237323" y="4087888"/>
+            <a:off x="16716071" y="3834139"/>
             <a:ext cx="1607880" cy="369332"/>
           </a:xfrm>
           <a:prstGeom prst="rect">
@@ -24257,17 +24072,17 @@
                 </a:solidFill>
                 <a:latin typeface="Arial Black" panose="020B0A04020102020204" pitchFamily="34" charset="0"/>
               </a:rPr>
-              <a:t>75%</a:t>
+              <a:t>55%</a:t>
             </a:r>
           </a:p>
         </p:txBody>
       </p:sp>
       <p:sp>
         <p:nvSpPr>
-          <p:cNvPr id="18" name="Szövegdoboz 17">
+          <p:cNvPr id="25" name="Szövegdoboz 24">
             <a:extLst>
               <a:ext uri="{FF2B5EF4-FFF2-40B4-BE49-F238E27FC236}">
-                <a16:creationId xmlns:a16="http://schemas.microsoft.com/office/drawing/2014/main" id="{EB49BB72-2170-360C-5351-7A787A252E30}"/>
+                <a16:creationId xmlns:a16="http://schemas.microsoft.com/office/drawing/2014/main" id="{382613FF-ABFD-AD88-4591-7F0D5229F6EB}"/>
               </a:ext>
             </a:extLst>
           </p:cNvPr>
@@ -24276,7 +24091,7 @@
         </p:nvSpPr>
         <p:spPr>
           <a:xfrm>
-            <a:off x="14470534" y="3142757"/>
+            <a:off x="18176870" y="3571137"/>
             <a:ext cx="1607880" cy="369332"/>
           </a:xfrm>
           <a:prstGeom prst="rect">
@@ -24300,17 +24115,17 @@
                 </a:solidFill>
                 <a:latin typeface="Arial Black" panose="020B0A04020102020204" pitchFamily="34" charset="0"/>
               </a:rPr>
-              <a:t>25%</a:t>
+              <a:t>45%</a:t>
             </a:r>
           </a:p>
         </p:txBody>
       </p:sp>
       <p:grpSp>
         <p:nvGrpSpPr>
-          <p:cNvPr id="51" name="Csoportba foglalás 50">
+          <p:cNvPr id="135" name="Csoportba foglalás 134">
             <a:extLst>
               <a:ext uri="{FF2B5EF4-FFF2-40B4-BE49-F238E27FC236}">
-                <a16:creationId xmlns:a16="http://schemas.microsoft.com/office/drawing/2014/main" id="{FB640781-C22C-4312-0AE9-18A18A1508B0}"/>
+                <a16:creationId xmlns:a16="http://schemas.microsoft.com/office/drawing/2014/main" id="{DA002837-B9F4-D548-CB07-30FE0DD5403F}"/>
               </a:ext>
             </a:extLst>
           </p:cNvPr>
@@ -24319,7 +24134,7 @@
         </p:nvGrpSpPr>
         <p:grpSpPr>
           <a:xfrm>
-            <a:off x="8532415" y="1948564"/>
+            <a:off x="9534344" y="1964932"/>
             <a:ext cx="8820514" cy="3927249"/>
             <a:chOff x="4756241" y="2034133"/>
             <a:chExt cx="8820514" cy="3927249"/>
@@ -24327,10 +24142,10 @@
         </p:grpSpPr>
         <p:sp>
           <p:nvSpPr>
-            <p:cNvPr id="52" name="Téglalap 51">
+            <p:cNvPr id="136" name="Téglalap 135">
               <a:extLst>
                 <a:ext uri="{FF2B5EF4-FFF2-40B4-BE49-F238E27FC236}">
-                  <a16:creationId xmlns:a16="http://schemas.microsoft.com/office/drawing/2014/main" id="{A2344AD1-EA34-EDD9-5E9E-806B5D15DA26}"/>
+                  <a16:creationId xmlns:a16="http://schemas.microsoft.com/office/drawing/2014/main" id="{96FDFF72-B19A-86C5-BF11-7357ECD801D8}"/>
                 </a:ext>
               </a:extLst>
             </p:cNvPr>
@@ -24382,10 +24197,10 @@
         </p:sp>
         <p:sp>
           <p:nvSpPr>
-            <p:cNvPr id="53" name="Szövegdoboz 52">
+            <p:cNvPr id="137" name="Szövegdoboz 136">
               <a:extLst>
                 <a:ext uri="{FF2B5EF4-FFF2-40B4-BE49-F238E27FC236}">
-                  <a16:creationId xmlns:a16="http://schemas.microsoft.com/office/drawing/2014/main" id="{8F609BCC-D8F5-59A6-FF2A-C5DBF1472926}"/>
+                  <a16:creationId xmlns:a16="http://schemas.microsoft.com/office/drawing/2014/main" id="{9956F22F-7194-954F-344E-1F2BB79FBAD9}"/>
                 </a:ext>
               </a:extLst>
             </p:cNvPr>
@@ -24430,10 +24245,10 @@
         </p:sp>
         <p:sp>
           <p:nvSpPr>
-            <p:cNvPr id="54" name="Téglalap 53">
+            <p:cNvPr id="138" name="Téglalap 137">
               <a:extLst>
                 <a:ext uri="{FF2B5EF4-FFF2-40B4-BE49-F238E27FC236}">
-                  <a16:creationId xmlns:a16="http://schemas.microsoft.com/office/drawing/2014/main" id="{234CDEE4-7829-4BC3-3462-EFF2D247B3C3}"/>
+                  <a16:creationId xmlns:a16="http://schemas.microsoft.com/office/drawing/2014/main" id="{5BD684E7-678A-08A4-DBB7-288EE26F01C4}"/>
                 </a:ext>
               </a:extLst>
             </p:cNvPr>
@@ -24486,10 +24301,10 @@
       </p:grpSp>
       <p:sp>
         <p:nvSpPr>
-          <p:cNvPr id="55" name="Szövegdoboz 54">
+          <p:cNvPr id="139" name="Szövegdoboz 138">
             <a:extLst>
               <a:ext uri="{FF2B5EF4-FFF2-40B4-BE49-F238E27FC236}">
-                <a16:creationId xmlns:a16="http://schemas.microsoft.com/office/drawing/2014/main" id="{2E99FEAE-FD8E-1C1B-1D0D-87EE6991B259}"/>
+                <a16:creationId xmlns:a16="http://schemas.microsoft.com/office/drawing/2014/main" id="{771A9CB7-D959-6DF5-A707-8653BDDA9686}"/>
               </a:ext>
             </a:extLst>
           </p:cNvPr>
@@ -24498,7 +24313,7 @@
         </p:nvSpPr>
         <p:spPr>
           <a:xfrm>
-            <a:off x="9001597" y="3236418"/>
+            <a:off x="10003526" y="3252786"/>
             <a:ext cx="5791984" cy="369332"/>
           </a:xfrm>
           <a:prstGeom prst="rect">
@@ -24526,10 +24341,10 @@
       </p:sp>
       <p:sp>
         <p:nvSpPr>
-          <p:cNvPr id="56" name="Szövegdoboz 55">
+          <p:cNvPr id="140" name="Szövegdoboz 139">
             <a:extLst>
               <a:ext uri="{FF2B5EF4-FFF2-40B4-BE49-F238E27FC236}">
-                <a16:creationId xmlns:a16="http://schemas.microsoft.com/office/drawing/2014/main" id="{516D031A-723A-39F3-F95D-C066FA80E9AF}"/>
+                <a16:creationId xmlns:a16="http://schemas.microsoft.com/office/drawing/2014/main" id="{7C60F2BB-4246-2D72-4CF6-125949D1BED6}"/>
               </a:ext>
             </a:extLst>
           </p:cNvPr>
@@ -24538,7 +24353,7 @@
         </p:nvSpPr>
         <p:spPr>
           <a:xfrm>
-            <a:off x="9023470" y="3750854"/>
+            <a:off x="10025399" y="3767222"/>
             <a:ext cx="5791984" cy="369332"/>
           </a:xfrm>
           <a:prstGeom prst="rect">
@@ -24566,10 +24381,10 @@
       </p:sp>
       <p:sp>
         <p:nvSpPr>
-          <p:cNvPr id="57" name="Téglalap 56">
+          <p:cNvPr id="141" name="Téglalap 140">
             <a:extLst>
               <a:ext uri="{FF2B5EF4-FFF2-40B4-BE49-F238E27FC236}">
-                <a16:creationId xmlns:a16="http://schemas.microsoft.com/office/drawing/2014/main" id="{BF59A56E-BD6A-892B-C826-D4D3069A8057}"/>
+                <a16:creationId xmlns:a16="http://schemas.microsoft.com/office/drawing/2014/main" id="{610484BC-41F0-4313-1CA3-BB49E16EC88E}"/>
               </a:ext>
             </a:extLst>
           </p:cNvPr>
@@ -24578,7 +24393,7 @@
         </p:nvSpPr>
         <p:spPr>
           <a:xfrm>
-            <a:off x="10579731" y="3230414"/>
+            <a:off x="11581660" y="3246782"/>
             <a:ext cx="346609" cy="333104"/>
           </a:xfrm>
           <a:prstGeom prst="rect">
@@ -24629,10 +24444,10 @@
       </p:sp>
       <p:sp>
         <p:nvSpPr>
-          <p:cNvPr id="58" name="Téglalap 57">
+          <p:cNvPr id="142" name="Téglalap 141">
             <a:extLst>
               <a:ext uri="{FF2B5EF4-FFF2-40B4-BE49-F238E27FC236}">
-                <a16:creationId xmlns:a16="http://schemas.microsoft.com/office/drawing/2014/main" id="{7D12840F-D96F-F5A2-C755-CB1A4DF18D8F}"/>
+                <a16:creationId xmlns:a16="http://schemas.microsoft.com/office/drawing/2014/main" id="{CA0CA0D0-1C0D-7704-B78E-6F7F1CF2EB2D}"/>
               </a:ext>
             </a:extLst>
           </p:cNvPr>
@@ -24641,7 +24456,7 @@
         </p:nvSpPr>
         <p:spPr>
           <a:xfrm>
-            <a:off x="10577116" y="3733761"/>
+            <a:off x="11579045" y="3750129"/>
             <a:ext cx="346609" cy="333104"/>
           </a:xfrm>
           <a:prstGeom prst="rect">
@@ -24692,10 +24507,10 @@
       </p:sp>
       <p:sp>
         <p:nvSpPr>
-          <p:cNvPr id="59" name="Szövegdoboz 58">
+          <p:cNvPr id="143" name="Szövegdoboz 142">
             <a:extLst>
               <a:ext uri="{FF2B5EF4-FFF2-40B4-BE49-F238E27FC236}">
-                <a16:creationId xmlns:a16="http://schemas.microsoft.com/office/drawing/2014/main" id="{FD767D92-3E85-A122-7388-9D26DA564F3F}"/>
+                <a16:creationId xmlns:a16="http://schemas.microsoft.com/office/drawing/2014/main" id="{3944A876-93C3-A473-70F7-A5CB8E89B506}"/>
               </a:ext>
             </a:extLst>
           </p:cNvPr>
@@ -24704,7 +24519,7 @@
         </p:nvSpPr>
         <p:spPr>
           <a:xfrm>
-            <a:off x="8744802" y="2791694"/>
+            <a:off x="9746731" y="2808062"/>
             <a:ext cx="5791984" cy="369332"/>
           </a:xfrm>
           <a:prstGeom prst="rect">
@@ -24748,13 +24563,13 @@
   <p:clrMapOvr>
     <a:masterClrMapping/>
   </p:clrMapOvr>
-  <mc:AlternateContent xmlns:mc="http://schemas.openxmlformats.org/markup-compatibility/2006">
-    <mc:Choice xmlns:p159="http://schemas.microsoft.com/office/powerpoint/2015/09/main" Requires="p159">
+  <mc:AlternateContent xmlns:mc="http://schemas.openxmlformats.org/markup-compatibility/2006" xmlns:p159="http://schemas.microsoft.com/office/powerpoint/2015/09/main">
+    <mc:Choice Requires="p159">
       <p:transition spd="slow">
         <p159:morph option="byObject"/>
       </p:transition>
     </mc:Choice>
-    <mc:Fallback>
+    <mc:Fallback xmlns="">
       <p:transition spd="slow">
         <p:fade/>
       </p:transition>
@@ -26050,7 +25865,7 @@
                 </a:solidFill>
                 <a:latin typeface="Arial Black" panose="020B0A04020102020204" pitchFamily="34" charset="0"/>
               </a:rPr>
-              <a:t>25%</a:t>
+              <a:t>30.4%</a:t>
             </a:r>
           </a:p>
         </p:txBody>
